--- a/docs/decks/BrokerVerse_Claims_Officer_Guide.pptx
+++ b/docs/decks/BrokerVerse_Claims_Officer_Guide.pptx
@@ -3273,7 +3273,7 @@
                 </a:solidFill>
                 <a:latin typeface="Calibri"/>
               </a:rPr>
-              <a:t>BDO Insure (BDOI) insurance broking · Philippines · PHP</a:t>
+              <a:t>BrokerVerse OOTB · insurance broking · Philippines · PHP</a:t>
             </a:r>
           </a:p>
         </p:txBody>
@@ -3820,7 +3820,7 @@
                 </a:solidFill>
                 <a:latin typeface="Calibri"/>
               </a:rPr>
-              <a:t>Home (business overview dashboard)</a:t>
+              <a:t>Claims Dashboard</a:t>
             </a:r>
           </a:p>
         </p:txBody>
@@ -4349,7 +4349,7 @@
                 </a:solidFill>
                 <a:latin typeface="Calibri"/>
               </a:rPr>
-              <a:t>estimate, approved and settled amounts, age, bucket.</a:t>
+              <a:t>estimate, approved and settled amounts, age, bucket; Preview on screen.</a:t>
             </a:r>
           </a:p>
           <a:p>
@@ -4379,7 +4379,7 @@
                 </a:solidFill>
                 <a:latin typeface="Calibri"/>
               </a:rPr>
-              <a:t>CSV, XLSX, PDF.</a:t>
+              <a:t>CSV, Excel (XLSX) or PDF; Claims Ageing in Reports &gt; All Reports.</a:t>
             </a:r>
           </a:p>
         </p:txBody>
@@ -7218,7 +7218,7 @@
                 </a:solidFill>
                 <a:latin typeface="Calibri"/>
               </a:rPr>
-              <a:t>REPORTS &gt; OPERATIONAL / FINANCIAL</a:t>
+              <a:t>REPORTS &gt; ALL REPORTS</a:t>
             </a:r>
           </a:p>
         </p:txBody>
@@ -7712,7 +7712,7 @@
                 </a:solidFill>
                 <a:latin typeface="Calibri"/>
               </a:rPr>
-              <a:t>Eight operational reports in your catalogue.</a:t>
+              <a:t>Eight operational reports in Reports &gt; All Reports.</a:t>
             </a:r>
           </a:p>
         </p:txBody>
@@ -7865,7 +7865,7 @@
                           </a:solidFill>
                           <a:latin typeface="Calibri"/>
                         </a:rPr>
-                        <a:t>Reports &gt; Operational &gt; Production</a:t>
+                        <a:t>All Reports; Operational &gt; Production</a:t>
                       </a:r>
                     </a:p>
                   </a:txBody>
@@ -7933,7 +7933,7 @@
                           </a:solidFill>
                           <a:latin typeface="Calibri"/>
                         </a:rPr>
-                        <a:t>Reports &gt; Operational &gt; Claims</a:t>
+                        <a:t>All Reports; Operational &gt; Claims</a:t>
                       </a:r>
                     </a:p>
                   </a:txBody>
@@ -8001,7 +8001,7 @@
                           </a:solidFill>
                           <a:latin typeface="Calibri"/>
                         </a:rPr>
-                        <a:t>Reports &gt; Operational &gt; Renewal</a:t>
+                        <a:t>All Reports; Operational &gt; Renewal</a:t>
                       </a:r>
                     </a:p>
                   </a:txBody>
@@ -8069,7 +8069,7 @@
                           </a:solidFill>
                           <a:latin typeface="Calibri"/>
                         </a:rPr>
-                        <a:t>Reports &gt; Operational &gt; Remittance</a:t>
+                        <a:t>All Reports; Operational &gt; Remittance</a:t>
                       </a:r>
                     </a:p>
                   </a:txBody>
@@ -8137,7 +8137,7 @@
                           </a:solidFill>
                           <a:latin typeface="Calibri"/>
                         </a:rPr>
-                        <a:t>Reports &gt; Operational &gt; Broker Commission</a:t>
+                        <a:t>All Reports; Operational &gt; Broker Commission</a:t>
                       </a:r>
                     </a:p>
                   </a:txBody>
@@ -8205,7 +8205,7 @@
                           </a:solidFill>
                           <a:latin typeface="Calibri"/>
                         </a:rPr>
-                        <a:t>Executive Dashboard &gt; Export Report</a:t>
+                        <a:t>Reports &gt; All Reports</a:t>
                       </a:r>
                     </a:p>
                   </a:txBody>
@@ -8273,7 +8273,7 @@
                           </a:solidFill>
                           <a:latin typeface="Calibri"/>
                         </a:rPr>
-                        <a:t>Executive Dashboard &gt; Export Report</a:t>
+                        <a:t>Reports &gt; All Reports</a:t>
                       </a:r>
                     </a:p>
                   </a:txBody>
@@ -8341,7 +8341,7 @@
                           </a:solidFill>
                           <a:latin typeface="Calibri"/>
                         </a:rPr>
-                        <a:t>Claims Dashboard &gt; Export Report</a:t>
+                        <a:t>Reports &gt; All Reports</a:t>
                       </a:r>
                     </a:p>
                   </a:txBody>
@@ -10256,7 +10256,7 @@
                 </a:solidFill>
                 <a:latin typeface="Calibri"/>
               </a:rPr>
-              <a:t>Some date pickers still show month-first dates (MM/DD/YYYY) although the configured format is DD/MM/YYYY.</a:t>
+              <a:t>Your session is kept in the browser’s local storage: sign out on shared computers and keep the browser up to date.</a:t>
             </a:r>
           </a:p>
           <a:p>
@@ -10277,7 +10277,7 @@
                 </a:solidFill>
                 <a:latin typeface="Calibri"/>
               </a:rPr>
-              <a:t>A few screens use the browser’s own confirm boxes instead of in-app dialogs.</a:t>
+              <a:t>Two-factor set-up shows a setup key and an app link, but no QR code: type the key into the authenticator app.</a:t>
             </a:r>
           </a:p>
           <a:p>
@@ -10298,7 +10298,7 @@
                 </a:solidFill>
                 <a:latin typeface="Calibri"/>
               </a:rPr>
-              <a:t>Address and adjuster fixes are awaiting re-test in the final run: report anything odd.</a:t>
+              <a:t>Screens are in English or Thai; Filipino is configured but has no translation yet.</a:t>
             </a:r>
           </a:p>
           <a:p>
@@ -10319,28 +10319,7 @@
                 </a:solidFill>
                 <a:latin typeface="Calibri"/>
               </a:rPr>
-              <a:t>The Clients list can fail to open for this role in the current build: use Policy instead.</a:t>
-            </a:r>
-          </a:p>
-          <a:p>
-            <a:pPr marL="201168" indent="-182880">
-              <a:spcAft>
-                <a:spcPts val="800"/>
-              </a:spcAft>
-              <a:buClr>
-                <a:srgbClr val="5B6778"/>
-              </a:buClr>
-              <a:buFont typeface="Arial"/>
-              <a:buChar char="•"/>
-            </a:pPr>
-            <a:r>
-              <a:rPr sz="1500">
-                <a:solidFill>
-                  <a:srgbClr val="1F2937"/>
-                </a:solidFill>
-                <a:latin typeface="Calibri"/>
-              </a:rPr>
-              <a:t>Report screens may show a permission message while loading the agent filter; the report still runs.</a:t>
+              <a:t>Claims officers do not create leads: Create Lead and Create Policy are hidden for this role.</a:t>
             </a:r>
           </a:p>
         </p:txBody>
@@ -10831,7 +10810,7 @@
                 </a:solidFill>
                 <a:latin typeface="Calibri"/>
               </a:rPr>
-              <a:t>&lt;to be confirmed by BDOI&gt;</a:t>
+              <a:t>&lt;service desk to be confirmed&gt;</a:t>
             </a:r>
           </a:p>
         </p:txBody>
@@ -11624,7 +11603,7 @@
                 </a:solidFill>
                 <a:latin typeface="Calibri"/>
               </a:rPr>
-              <a:t>User names carlo.claims and lisa.claims2. Land on Home; the Claims Dashboard is in the Dashboard menu.</a:t>
+              <a:t>User names carlo.claims and lisa.claims2. Land on the Claims Dashboard.</a:t>
             </a:r>
           </a:p>
         </p:txBody>
@@ -12850,6 +12829,27 @@
                 </a:solidFill>
                 <a:latin typeface="Calibri"/>
               </a:rPr>
+              <a:t>All Reports (8 reports)</a:t>
+            </a:r>
+          </a:p>
+          <a:p>
+            <a:pPr marL="201168" indent="-182880">
+              <a:spcAft>
+                <a:spcPts val="200"/>
+              </a:spcAft>
+              <a:buClr>
+                <a:srgbClr val="1E88E5"/>
+              </a:buClr>
+              <a:buFont typeface="Arial"/>
+              <a:buChar char="•"/>
+            </a:pPr>
+            <a:r>
+              <a:rPr sz="1500">
+                <a:solidFill>
+                  <a:srgbClr val="1F2937"/>
+                </a:solidFill>
+                <a:latin typeface="Calibri"/>
+              </a:rPr>
               <a:t>Operational Reports: Production, Claims, Renewal, Remittance, Broker Commission</a:t>
             </a:r>
           </a:p>
@@ -14128,7 +14128,7 @@
                 </a:solidFill>
                 <a:latin typeface="Calibri"/>
               </a:rPr>
-              <a:t>Registering a claim: loss date rule</a:t>
+              <a:t>Registering a claim</a:t>
             </a:r>
           </a:p>
         </p:txBody>
@@ -14142,7 +14142,7 @@
         <p:spPr>
           <a:xfrm>
             <a:off x="420624" y="1243584"/>
-            <a:ext cx="7315200" cy="4599432"/>
+            <a:ext cx="4331748" cy="4599432"/>
           </a:xfrm>
           <a:prstGeom prst="rect">
             <a:avLst/>
@@ -14196,7 +14196,7 @@
         <p:spPr>
           <a:xfrm>
             <a:off x="457200" y="1280160"/>
-            <a:ext cx="7242048" cy="4526280"/>
+            <a:ext cx="4258596" cy="4526280"/>
           </a:xfrm>
           <a:prstGeom prst="rect">
             <a:avLst/>
@@ -14236,7 +14236,7 @@
                 </a:solidFill>
                 <a:latin typeface="Calibri"/>
               </a:rPr>
-              <a:t>Screen from the recorded end-to-end run — Claim request refused for a loss date outside cover — carlo.claims</a:t>
+              <a:t>Live screen — Claim Request from the policy row — signed in as carlo.claims</a:t>
             </a:r>
           </a:p>
         </p:txBody>
@@ -14317,7 +14317,7 @@
                 </a:solidFill>
                 <a:latin typeface="Calibri"/>
               </a:rPr>
-              <a:t>Clients &gt; policy &gt; Claim Request</a:t>
+              <a:t>Operations &gt; Policy &gt; … &gt; Claim</a:t>
             </a:r>
           </a:p>
         </p:txBody>
@@ -14368,7 +14368,7 @@
                 </a:solidFill>
                 <a:latin typeface="Calibri"/>
               </a:rPr>
-              <a:t>date and cause of loss; date not in the future.</a:t>
+              <a:t>date and cause of loss; date not in the future; reported date not before the loss.</a:t>
             </a:r>
           </a:p>
           <a:p>
@@ -14398,7 +14398,7 @@
                 </a:solidFill>
                 <a:latin typeface="Calibri"/>
               </a:rPr>
-              <a:t>loss date must be inside the policy period, or the claim is refused with the reason.</a:t>
+              <a:t>loss date must be inside the policy period and premium paid, or the claim is refused with the reason.</a:t>
             </a:r>
           </a:p>
           <a:p>
@@ -14792,7 +14792,7 @@
                 </a:solidFill>
                 <a:latin typeface="Calibri"/>
               </a:rPr>
-              <a:t>Screen from the recorded end-to-end run — Claim CLM-2026-00002 raised — carlo.claims</a:t>
+              <a:t>Live screen — Waiting for Update: the claim is with the insurer — signed in as carlo.claims</a:t>
             </a:r>
           </a:p>
         </p:txBody>
@@ -14873,7 +14873,7 @@
                 </a:solidFill>
                 <a:latin typeface="Calibri"/>
               </a:rPr>
-              <a:t>Clients &gt; policy &gt; Claim Request &gt; Send</a:t>
+              <a:t>Operations &gt; Claims &gt; eye icon</a:t>
             </a:r>
           </a:p>
         </p:txBody>
@@ -15254,7 +15254,7 @@
         <p:spPr>
           <a:xfrm>
             <a:off x="420624" y="1243584"/>
-            <a:ext cx="7315200" cy="4599432"/>
+            <a:ext cx="5641510" cy="4599432"/>
           </a:xfrm>
           <a:prstGeom prst="rect">
             <a:avLst/>
@@ -15308,7 +15308,7 @@
         <p:spPr>
           <a:xfrm>
             <a:off x="457200" y="1280160"/>
-            <a:ext cx="7242048" cy="4526280"/>
+            <a:ext cx="5568358" cy="4526280"/>
           </a:xfrm>
           <a:prstGeom prst="rect">
             <a:avLst/>
@@ -15348,7 +15348,7 @@
                 </a:solidFill>
                 <a:latin typeface="Calibri"/>
               </a:rPr>
-              <a:t>Screen from the recorded end-to-end run — Adjuster submission — carlo.claims</a:t>
+              <a:t>Live screen — Adjuster details — signed in as carlo.claims</a:t>
             </a:r>
           </a:p>
         </p:txBody>
@@ -15429,7 +15429,7 @@
                 </a:solidFill>
                 <a:latin typeface="Calibri"/>
               </a:rPr>
-              <a:t>Claim &gt; Adjuster submission</a:t>
+              <a:t>Claim &gt; Proceed &gt; Adjuster details</a:t>
             </a:r>
           </a:p>
         </p:txBody>
@@ -15780,7 +15780,7 @@
         <p:spPr>
           <a:xfrm>
             <a:off x="420624" y="1243584"/>
-            <a:ext cx="7315200" cy="4599432"/>
+            <a:ext cx="4599432" cy="4599432"/>
           </a:xfrm>
           <a:prstGeom prst="rect">
             <a:avLst/>
@@ -15834,7 +15834,7 @@
         <p:spPr>
           <a:xfrm>
             <a:off x="457200" y="1280160"/>
-            <a:ext cx="7242048" cy="4526280"/>
+            <a:ext cx="4526280" cy="4526280"/>
           </a:xfrm>
           <a:prstGeom prst="rect">
             <a:avLst/>
